--- a/test-corpus/word-verification/requirement-diagram.pptx
+++ b/test-corpus/word-verification/requirement-diagram.pptx
@@ -144,7 +144,7 @@
         </p:nvCxnSpPr>
         <p:spPr>
           <a:xfrm>
-            <a:off x="6096000" y="2034782"/>
+            <a:off x="3974592" y="2034782"/>
             <a:ext cx="1" cy="664394"/>
           </a:xfrm>
           <a:prstGeom prst="line">
@@ -167,7 +167,7 @@
         </p:nvSpPr>
         <p:spPr>
           <a:xfrm>
-            <a:off x="5788481" y="2272066"/>
+            <a:off x="3667073" y="2272066"/>
             <a:ext cx="615039" cy="189827"/>
           </a:xfrm>
           <a:prstGeom prst="rect">
@@ -209,7 +209,7 @@
         </p:nvCxnSpPr>
         <p:spPr>
           <a:xfrm>
-            <a:off x="6162440" y="4103895"/>
+            <a:off x="4041032" y="4103895"/>
             <a:ext cx="1" cy="664394"/>
           </a:xfrm>
           <a:prstGeom prst="line">
@@ -232,7 +232,7 @@
         </p:nvSpPr>
         <p:spPr>
           <a:xfrm>
-            <a:off x="5923258" y="4265248"/>
+            <a:off x="3801850" y="4265248"/>
             <a:ext cx="478364" cy="189827"/>
           </a:xfrm>
           <a:prstGeom prst="rect">
@@ -274,7 +274,7 @@
         </p:nvCxnSpPr>
         <p:spPr>
           <a:xfrm flipV="1">
-            <a:off x="6029561" y="4103895"/>
+            <a:off x="3908153" y="4103895"/>
             <a:ext cx="1" cy="664394"/>
           </a:xfrm>
           <a:prstGeom prst="line">
@@ -297,7 +297,7 @@
         </p:nvSpPr>
         <p:spPr>
           <a:xfrm>
-            <a:off x="5767600" y="4417109"/>
+            <a:off x="3646192" y="4417109"/>
             <a:ext cx="523922" cy="189827"/>
           </a:xfrm>
           <a:prstGeom prst="rect">
@@ -339,7 +339,7 @@
         </p:nvSpPr>
         <p:spPr>
           <a:xfrm>
-            <a:off x="5474317" y="2699176"/>
+            <a:off x="3352909" y="2699176"/>
             <a:ext cx="1243366" cy="1404719"/>
           </a:xfrm>
           <a:prstGeom prst="rect">
@@ -363,7 +363,7 @@
         </p:nvSpPr>
         <p:spPr>
           <a:xfrm>
-            <a:off x="5474317" y="2699176"/>
+            <a:off x="3352909" y="2699176"/>
             <a:ext cx="1243366" cy="303723"/>
           </a:xfrm>
           <a:prstGeom prst="rect">
@@ -385,7 +385,7 @@
         </p:nvSpPr>
         <p:spPr>
           <a:xfrm>
-            <a:off x="5474317" y="2998153"/>
+            <a:off x="3352909" y="2998153"/>
             <a:ext cx="1243366" cy="9491"/>
           </a:xfrm>
           <a:prstGeom prst="rect">
@@ -407,7 +407,7 @@
         </p:nvSpPr>
         <p:spPr>
           <a:xfrm>
-            <a:off x="5474317" y="2699176"/>
+            <a:off x="3352909" y="2699176"/>
             <a:ext cx="1243366" cy="303723"/>
           </a:xfrm>
           <a:prstGeom prst="rect">
@@ -449,7 +449,7 @@
         </p:nvSpPr>
         <p:spPr>
           <a:xfrm>
-            <a:off x="5569230" y="3002899"/>
+            <a:off x="3447822" y="3002899"/>
             <a:ext cx="1053540" cy="1100996"/>
           </a:xfrm>
           <a:prstGeom prst="rect">
@@ -563,7 +563,7 @@
         </p:nvSpPr>
         <p:spPr>
           <a:xfrm>
-            <a:off x="5289236" y="4768289"/>
+            <a:off x="3167828" y="4768289"/>
             <a:ext cx="1613528" cy="1404719"/>
           </a:xfrm>
           <a:prstGeom prst="rect">
@@ -587,7 +587,7 @@
         </p:nvSpPr>
         <p:spPr>
           <a:xfrm>
-            <a:off x="5289236" y="4768289"/>
+            <a:off x="3167828" y="4768289"/>
             <a:ext cx="1613528" cy="303723"/>
           </a:xfrm>
           <a:prstGeom prst="rect">
@@ -609,7 +609,7 @@
         </p:nvSpPr>
         <p:spPr>
           <a:xfrm>
-            <a:off x="5289236" y="5067266"/>
+            <a:off x="3167828" y="5067266"/>
             <a:ext cx="1613528" cy="9491"/>
           </a:xfrm>
           <a:prstGeom prst="rect">
@@ -631,7 +631,7 @@
         </p:nvSpPr>
         <p:spPr>
           <a:xfrm>
-            <a:off x="5289236" y="4768289"/>
+            <a:off x="3167828" y="4768289"/>
             <a:ext cx="1613528" cy="303723"/>
           </a:xfrm>
           <a:prstGeom prst="rect">
@@ -673,7 +673,7 @@
         </p:nvSpPr>
         <p:spPr>
           <a:xfrm>
-            <a:off x="5384149" y="5072012"/>
+            <a:off x="3262741" y="5072012"/>
             <a:ext cx="1423702" cy="1100996"/>
           </a:xfrm>
           <a:prstGeom prst="rect">
@@ -787,7 +787,7 @@
         </p:nvSpPr>
         <p:spPr>
           <a:xfrm>
-            <a:off x="5517978" y="1256492"/>
+            <a:off x="3396570" y="1256492"/>
             <a:ext cx="1156046" cy="778290"/>
           </a:xfrm>
           <a:prstGeom prst="rect">
@@ -811,7 +811,7 @@
         </p:nvSpPr>
         <p:spPr>
           <a:xfrm>
-            <a:off x="5517978" y="1256492"/>
+            <a:off x="3396570" y="1256492"/>
             <a:ext cx="1156046" cy="303723"/>
           </a:xfrm>
           <a:prstGeom prst="rect">
@@ -833,7 +833,7 @@
         </p:nvSpPr>
         <p:spPr>
           <a:xfrm>
-            <a:off x="5517978" y="1555469"/>
+            <a:off x="3396570" y="1555469"/>
             <a:ext cx="1156046" cy="9491"/>
           </a:xfrm>
           <a:prstGeom prst="rect">
@@ -855,7 +855,7 @@
         </p:nvSpPr>
         <p:spPr>
           <a:xfrm>
-            <a:off x="5517978" y="1256492"/>
+            <a:off x="3396570" y="1256492"/>
             <a:ext cx="1156046" cy="303723"/>
           </a:xfrm>
           <a:prstGeom prst="rect">
@@ -897,7 +897,7 @@
         </p:nvSpPr>
         <p:spPr>
           <a:xfrm>
-            <a:off x="5612891" y="1560215"/>
+            <a:off x="3491483" y="1560215"/>
             <a:ext cx="966220" cy="474567"/>
           </a:xfrm>
           <a:prstGeom prst="rect">
@@ -945,6 +945,283 @@
                 </a:solidFill>
               </a:rPr>
               <a:t>type: simulation</a:t>
+            </a:r>
+          </a:p>
+        </p:txBody>
+      </p:sp>
+      <p:sp>
+        <p:nvSpPr>
+          <p:cNvPr id="4" name="Mermaid source"/>
+          <p:cNvSpPr/>
+          <p:nvPr/>
+        </p:nvSpPr>
+        <p:spPr>
+          <a:xfrm>
+            <a:off x="7674864" y="1028700"/>
+            <a:ext cx="4059936" cy="5372100"/>
+          </a:xfrm>
+          <a:prstGeom prst="rect">
+            <a:avLst/>
+          </a:prstGeom>
+          <a:solidFill>
+            <a:srgbClr val="F3F4F6"/>
+          </a:solidFill>
+          <a:ln w="9525">
+            <a:solidFill>
+              <a:srgbClr val="D1D5DB"/>
+            </a:solidFill>
+          </a:ln>
+        </p:spPr>
+        <p:txBody>
+          <a:bodyPr wrap="square" lIns="91440" tIns="45720" rIns="91440" bIns="45720" anchor="t">
+            <a:noAutofit/>
+          </a:bodyPr>
+          <a:lstStyle/>
+          <a:p>
+            <a:pPr algn="l"/>
+            <a:r>
+              <a:rPr lang="en-US" sz="1400" dirty="0">
+                <a:solidFill>
+                  <a:srgbClr val="1F2937"/>
+                </a:solidFill>
+                <a:latin typeface="Consolas"/>
+                <a:cs typeface="Consolas"/>
+              </a:rPr>
+              <a:t>requirementDiagram</a:t>
+            </a:r>
+          </a:p>
+          <a:p>
+            <a:pPr algn="l"/>
+            <a:r>
+              <a:rPr lang="en-US" sz="1400" dirty="0">
+                <a:solidFill>
+                  <a:srgbClr val="1F2937"/>
+                </a:solidFill>
+                <a:latin typeface="Consolas"/>
+                <a:cs typeface="Consolas"/>
+              </a:rPr>
+              <a:t>  requirement test_req {</a:t>
+            </a:r>
+          </a:p>
+          <a:p>
+            <a:pPr algn="l"/>
+            <a:r>
+              <a:rPr lang="en-US" sz="1400" dirty="0">
+                <a:solidFill>
+                  <a:srgbClr val="1F2937"/>
+                </a:solidFill>
+                <a:latin typeface="Consolas"/>
+                <a:cs typeface="Consolas"/>
+              </a:rPr>
+              <a:t>    id: 1</a:t>
+            </a:r>
+          </a:p>
+          <a:p>
+            <a:pPr algn="l"/>
+            <a:r>
+              <a:rPr lang="en-US" sz="1400" dirty="0">
+                <a:solidFill>
+                  <a:srgbClr val="1F2937"/>
+                </a:solidFill>
+                <a:latin typeface="Consolas"/>
+                <a:cs typeface="Consolas"/>
+              </a:rPr>
+              <a:t>    text: the test text.</a:t>
+            </a:r>
+          </a:p>
+          <a:p>
+            <a:pPr algn="l"/>
+            <a:r>
+              <a:rPr lang="en-US" sz="1400" dirty="0">
+                <a:solidFill>
+                  <a:srgbClr val="1F2937"/>
+                </a:solidFill>
+                <a:latin typeface="Consolas"/>
+                <a:cs typeface="Consolas"/>
+              </a:rPr>
+              <a:t>    risk: high</a:t>
+            </a:r>
+          </a:p>
+          <a:p>
+            <a:pPr algn="l"/>
+            <a:r>
+              <a:rPr lang="en-US" sz="1400" dirty="0">
+                <a:solidFill>
+                  <a:srgbClr val="1F2937"/>
+                </a:solidFill>
+                <a:latin typeface="Consolas"/>
+                <a:cs typeface="Consolas"/>
+              </a:rPr>
+              <a:t>    verifymethod: test</a:t>
+            </a:r>
+          </a:p>
+          <a:p>
+            <a:pPr algn="l"/>
+            <a:r>
+              <a:rPr lang="en-US" sz="1400" dirty="0">
+                <a:solidFill>
+                  <a:srgbClr val="1F2937"/>
+                </a:solidFill>
+                <a:latin typeface="Consolas"/>
+                <a:cs typeface="Consolas"/>
+              </a:rPr>
+              <a:t>  }</a:t>
+            </a:r>
+          </a:p>
+          <a:p>
+            <a:pPr algn="l"/>
+            <a:r>
+              <a:rPr lang="en-US" sz="1400" dirty="0">
+                <a:solidFill>
+                  <a:srgbClr val="1F2937"/>
+                </a:solidFill>
+                <a:latin typeface="Consolas"/>
+                <a:cs typeface="Consolas"/>
+              </a:rPr>
+              <a:t>  functionalRequirement test_req2 {</a:t>
+            </a:r>
+          </a:p>
+          <a:p>
+            <a:pPr algn="l"/>
+            <a:r>
+              <a:rPr lang="en-US" sz="1400" dirty="0">
+                <a:solidFill>
+                  <a:srgbClr val="1F2937"/>
+                </a:solidFill>
+                <a:latin typeface="Consolas"/>
+                <a:cs typeface="Consolas"/>
+              </a:rPr>
+              <a:t>    id: 1.1</a:t>
+            </a:r>
+          </a:p>
+          <a:p>
+            <a:pPr algn="l"/>
+            <a:r>
+              <a:rPr lang="en-US" sz="1400" dirty="0">
+                <a:solidFill>
+                  <a:srgbClr val="1F2937"/>
+                </a:solidFill>
+                <a:latin typeface="Consolas"/>
+                <a:cs typeface="Consolas"/>
+              </a:rPr>
+              <a:t>    text: the second test text.</a:t>
+            </a:r>
+          </a:p>
+          <a:p>
+            <a:pPr algn="l"/>
+            <a:r>
+              <a:rPr lang="en-US" sz="1400" dirty="0">
+                <a:solidFill>
+                  <a:srgbClr val="1F2937"/>
+                </a:solidFill>
+                <a:latin typeface="Consolas"/>
+                <a:cs typeface="Consolas"/>
+              </a:rPr>
+              <a:t>    risk: low</a:t>
+            </a:r>
+          </a:p>
+          <a:p>
+            <a:pPr algn="l"/>
+            <a:r>
+              <a:rPr lang="en-US" sz="1400" dirty="0">
+                <a:solidFill>
+                  <a:srgbClr val="1F2937"/>
+                </a:solidFill>
+                <a:latin typeface="Consolas"/>
+                <a:cs typeface="Consolas"/>
+              </a:rPr>
+              <a:t>    verifymethod: inspection</a:t>
+            </a:r>
+          </a:p>
+          <a:p>
+            <a:pPr algn="l"/>
+            <a:r>
+              <a:rPr lang="en-US" sz="1400" dirty="0">
+                <a:solidFill>
+                  <a:srgbClr val="1F2937"/>
+                </a:solidFill>
+                <a:latin typeface="Consolas"/>
+                <a:cs typeface="Consolas"/>
+              </a:rPr>
+              <a:t>  }</a:t>
+            </a:r>
+          </a:p>
+          <a:p>
+            <a:pPr algn="l"/>
+            <a:r>
+              <a:rPr lang="en-US" sz="1400" dirty="0">
+                <a:solidFill>
+                  <a:srgbClr val="1F2937"/>
+                </a:solidFill>
+                <a:latin typeface="Consolas"/>
+                <a:cs typeface="Consolas"/>
+              </a:rPr>
+              <a:t>  element test_entity {</a:t>
+            </a:r>
+          </a:p>
+          <a:p>
+            <a:pPr algn="l"/>
+            <a:r>
+              <a:rPr lang="en-US" sz="1400" dirty="0">
+                <a:solidFill>
+                  <a:srgbClr val="1F2937"/>
+                </a:solidFill>
+                <a:latin typeface="Consolas"/>
+                <a:cs typeface="Consolas"/>
+              </a:rPr>
+              <a:t>    type: simulation</a:t>
+            </a:r>
+          </a:p>
+          <a:p>
+            <a:pPr algn="l"/>
+            <a:r>
+              <a:rPr lang="en-US" sz="1400" dirty="0">
+                <a:solidFill>
+                  <a:srgbClr val="1F2937"/>
+                </a:solidFill>
+                <a:latin typeface="Consolas"/>
+                <a:cs typeface="Consolas"/>
+              </a:rPr>
+              <a:t>  }</a:t>
+            </a:r>
+          </a:p>
+          <a:p>
+            <a:pPr algn="l"/>
+            <a:r>
+              <a:rPr lang="en-US" sz="1400" dirty="0">
+                <a:solidFill>
+                  <a:srgbClr val="1F2937"/>
+                </a:solidFill>
+                <a:latin typeface="Consolas"/>
+                <a:cs typeface="Consolas"/>
+              </a:rPr>
+              <a:t>  test_entity - satisfies -&gt; test_req</a:t>
+            </a:r>
+          </a:p>
+          <a:p>
+            <a:pPr algn="l"/>
+            <a:r>
+              <a:rPr lang="en-US" sz="1400" dirty="0">
+                <a:solidFill>
+                  <a:srgbClr val="1F2937"/>
+                </a:solidFill>
+                <a:latin typeface="Consolas"/>
+                <a:cs typeface="Consolas"/>
+              </a:rPr>
+              <a:t>  test_req - traces -&gt; test_req2</a:t>
+            </a:r>
+          </a:p>
+          <a:p>
+            <a:pPr algn="l"/>
+            <a:r>
+              <a:rPr lang="en-US" sz="1400" dirty="0">
+                <a:solidFill>
+                  <a:srgbClr val="1F2937"/>
+                </a:solidFill>
+                <a:latin typeface="Consolas"/>
+                <a:cs typeface="Consolas"/>
+              </a:rPr>
+              <a:t>  test_req &lt;- derives - test_req2</a:t>
             </a:r>
           </a:p>
         </p:txBody>
